--- a/docs/Vigil_deck.pptx
+++ b/docs/Vigil_deck.pptx
@@ -3997,7 +3997,7 @@
               </a:defRPr>
             </a:pPr>
             <a:r>
-              <a:t>Streamlit-in-Snowflake app: chat + audit panel + ring graph + markdown download.</a:t>
+              <a:t>Streamlit-in-Snowflake app: branded AI-assistant-style chat (logo, hero, coloured cards) with inline cited answers + ring graph + finding download.</a:t>
             </a:r>
           </a:p>
         </p:txBody>

--- a/docs/Vigil_deck.pptx
+++ b/docs/Vigil_deck.pptx
@@ -3997,7 +3997,7 @@
               </a:defRPr>
             </a:pPr>
             <a:r>
-              <a:t>Streamlit-in-Snowflake app: branded AI-assistant-style chat (logo, hero, coloured cards) with inline cited answers + ring graph + finding download.</a:t>
+              <a:t>Streamlit-in-Snowflake app: Snowflake-native-styled chat (flat, Snowflake Blue accent) with inline cited answers + ring graph + finding download.</a:t>
             </a:r>
           </a:p>
         </p:txBody>
